--- a/image/image.pptx
+++ b/image/image.pptx
@@ -1406,6 +1406,58 @@
           <a:chExt cx="0" cy="0"/>
         </a:xfrm>
       </p:grpSpPr>
+      <p:sp>
+        <p:nvSpPr>
+          <p:cNvPr id="3" name="正方形/長方形 2">
+            <a:extLst>
+              <a:ext uri="{FF2B5EF4-FFF2-40B4-BE49-F238E27FC236}">
+                <a16:creationId xmlns:a16="http://schemas.microsoft.com/office/drawing/2014/main" id="{A226FEA1-FB79-3827-0677-D55FEF4038FE}"/>
+              </a:ext>
+            </a:extLst>
+          </p:cNvPr>
+          <p:cNvSpPr/>
+          <p:nvPr/>
+        </p:nvSpPr>
+        <p:spPr>
+          <a:xfrm>
+            <a:off x="3918" y="24698"/>
+            <a:ext cx="12188082" cy="6833302"/>
+          </a:xfrm>
+          <a:prstGeom prst="rect">
+            <a:avLst/>
+          </a:prstGeom>
+          <a:solidFill>
+            <a:srgbClr val="161E2D"/>
+          </a:solidFill>
+          <a:ln>
+            <a:noFill/>
+          </a:ln>
+        </p:spPr>
+        <p:style>
+          <a:lnRef idx="2">
+            <a:schemeClr val="accent1">
+              <a:shade val="50000"/>
+            </a:schemeClr>
+          </a:lnRef>
+          <a:fillRef idx="1">
+            <a:schemeClr val="accent1"/>
+          </a:fillRef>
+          <a:effectRef idx="0">
+            <a:schemeClr val="accent1"/>
+          </a:effectRef>
+          <a:fontRef idx="minor">
+            <a:schemeClr val="lt1"/>
+          </a:fontRef>
+        </p:style>
+        <p:txBody>
+          <a:bodyPr rtlCol="0" anchor="ctr"/>
+          <a:lstStyle/>
+          <a:p>
+            <a:pPr algn="ctr"/>
+            <a:endParaRPr kumimoji="1" lang="ja-JP" altLang="en-US" dirty="0" err="1"/>
+          </a:p>
+        </p:txBody>
+      </p:sp>
       <p:sp>
         <p:nvSpPr>
           <p:cNvPr id="2" name="タイトル 1">
@@ -4553,15 +4605,6 @@
 </file>
 
 <file path=customXml/item2.xml><?xml version="1.0" encoding="utf-8"?>
-<?mso-contentType ?>
-<FormTemplates xmlns="http://schemas.microsoft.com/sharepoint/v3/contenttype/forms">
-  <Display>DocumentLibraryForm</Display>
-  <Edit>DocumentLibraryForm</Edit>
-  <New>DocumentLibraryForm</New>
-</FormTemplates>
-</file>
-
-<file path=customXml/item3.xml><?xml version="1.0" encoding="utf-8"?>
 <p:properties xmlns:p="http://schemas.microsoft.com/office/2006/metadata/properties" xmlns:xsi="http://www.w3.org/2001/XMLSchema-instance" xmlns:pc="http://schemas.microsoft.com/office/infopath/2007/PartnerControls">
   <documentManagement>
     <lcf76f155ced4ddcb4097134ff3c332f xmlns="5858525f-8556-4a49-8c5b-46c9ac02e9a8">
@@ -4570,6 +4613,15 @@
     <TaxCatchAll xmlns="c15da466-223d-4a9a-9a5d-eb2bee72a60a" xsi:nil="true"/>
   </documentManagement>
 </p:properties>
+</file>
+
+<file path=customXml/item3.xml><?xml version="1.0" encoding="utf-8"?>
+<?mso-contentType ?>
+<FormTemplates xmlns="http://schemas.microsoft.com/sharepoint/v3/contenttype/forms">
+  <Display>DocumentLibraryForm</Display>
+  <Edit>DocumentLibraryForm</Edit>
+  <New>DocumentLibraryForm</New>
+</FormTemplates>
 </file>
 
 <file path=customXml/itemProps1.xml><?xml version="1.0" encoding="utf-8"?>
@@ -4592,14 +4644,6 @@
 </file>
 
 <file path=customXml/itemProps2.xml><?xml version="1.0" encoding="utf-8"?>
-<ds:datastoreItem xmlns:ds="http://schemas.openxmlformats.org/officeDocument/2006/customXml" ds:itemID="{3D7F2428-6C02-4D32-B14D-EBC3389A58AD}">
-  <ds:schemaRefs>
-    <ds:schemaRef ds:uri="http://schemas.microsoft.com/sharepoint/v3/contenttype/forms"/>
-  </ds:schemaRefs>
-</ds:datastoreItem>
-</file>
-
-<file path=customXml/itemProps3.xml><?xml version="1.0" encoding="utf-8"?>
 <ds:datastoreItem xmlns:ds="http://schemas.openxmlformats.org/officeDocument/2006/customXml" ds:itemID="{5B8EE619-C8F3-4123-BB4D-06897928292C}">
   <ds:schemaRefs>
     <ds:schemaRef ds:uri="http://www.w3.org/XML/1998/namespace"/>
@@ -4614,4 +4658,12 @@
     <ds:schemaRef ds:uri="http://purl.org/dc/elements/1.1/"/>
   </ds:schemaRefs>
 </ds:datastoreItem>
+</file>
+
+<file path=customXml/itemProps3.xml><?xml version="1.0" encoding="utf-8"?>
+<ds:datastoreItem xmlns:ds="http://schemas.openxmlformats.org/officeDocument/2006/customXml" ds:itemID="{3D7F2428-6C02-4D32-B14D-EBC3389A58AD}">
+  <ds:schemaRefs>
+    <ds:schemaRef ds:uri="http://schemas.microsoft.com/sharepoint/v3/contenttype/forms"/>
+  </ds:schemaRefs>
+</ds:datastoreItem>
 </file>
--- a/image/image.pptx
+++ b/image/image.pptx
@@ -2022,17 +2022,11 @@
           <a:bodyPr wrap="none" lIns="502920" tIns="91440"/>
           <a:lstStyle/>
           <a:p>
-            <a:pPr eaLnBrk="1" fontAlgn="auto" hangingPunct="1">
-              <a:spcBef>
-                <a:spcPts val="0"/>
-              </a:spcBef>
-              <a:spcAft>
-                <a:spcPts val="0"/>
-              </a:spcAft>
+            <a:pPr>
               <a:defRPr/>
             </a:pPr>
             <a:r>
-              <a:rPr lang="en-US" sz="1050" dirty="0">
+              <a:rPr lang="en-US" altLang="ja-JP" sz="1050" dirty="0">
                 <a:ln w="0"/>
                 <a:solidFill>
                   <a:schemeClr val="tx1"/>
@@ -2044,17 +2038,11 @@
             </a:r>
           </a:p>
           <a:p>
-            <a:pPr eaLnBrk="1" fontAlgn="auto" hangingPunct="1">
-              <a:spcBef>
-                <a:spcPts val="0"/>
-              </a:spcBef>
-              <a:spcAft>
-                <a:spcPts val="0"/>
-              </a:spcAft>
+            <a:pPr>
               <a:defRPr/>
             </a:pPr>
             <a:r>
-              <a:rPr lang="en-US" sz="1050" dirty="0">
+              <a:rPr lang="en-US" altLang="ja-JP" sz="1050" dirty="0">
                 <a:ln w="0"/>
                 <a:solidFill>
                   <a:schemeClr val="tx1"/>
@@ -2062,7 +2050,7 @@
                 <a:latin typeface="Arial" panose="020B0604020202020204" pitchFamily="34" charset="0"/>
                 <a:cs typeface="Arial" panose="020B0604020202020204" pitchFamily="34" charset="0"/>
               </a:rPr>
-              <a:t>Oracle DB</a:t>
+              <a:t>SQL Converter Agent </a:t>
             </a:r>
             <a:r>
               <a:rPr lang="ja-JP" altLang="en-US" sz="1050">
@@ -2073,9 +2061,9 @@
                 <a:latin typeface="Arial" panose="020B0604020202020204" pitchFamily="34" charset="0"/>
                 <a:cs typeface="Arial" panose="020B0604020202020204" pitchFamily="34" charset="0"/>
               </a:rPr>
-              <a:t> サーバ</a:t>
+              <a:t>サーバ</a:t>
             </a:r>
-            <a:endParaRPr lang="en-US" sz="1050" dirty="0">
+            <a:endParaRPr lang="en-US" altLang="ja-JP" sz="1050" dirty="0">
               <a:ln w="0"/>
               <a:solidFill>
                 <a:schemeClr val="tx1"/>
@@ -3477,6 +3465,39 @@
           </a:fontRef>
         </p:style>
       </p:cxnSp>
+      <p:sp>
+        <p:nvSpPr>
+          <p:cNvPr id="8" name="テキスト ボックス 7">
+            <a:extLst>
+              <a:ext uri="{FF2B5EF4-FFF2-40B4-BE49-F238E27FC236}">
+                <a16:creationId xmlns:a16="http://schemas.microsoft.com/office/drawing/2014/main" id="{000BBDB6-557A-E67A-CFAF-0C656DF357D5}"/>
+              </a:ext>
+            </a:extLst>
+          </p:cNvPr>
+          <p:cNvSpPr txBox="1"/>
+          <p:nvPr/>
+        </p:nvSpPr>
+        <p:spPr>
+          <a:xfrm>
+            <a:off x="13728325" y="1210962"/>
+            <a:ext cx="65" cy="369332"/>
+          </a:xfrm>
+          <a:prstGeom prst="rect">
+            <a:avLst/>
+          </a:prstGeom>
+          <a:noFill/>
+        </p:spPr>
+        <p:txBody>
+          <a:bodyPr wrap="none" lIns="0" rIns="0" rtlCol="0">
+            <a:spAutoFit/>
+          </a:bodyPr>
+          <a:lstStyle/>
+          <a:p>
+            <a:pPr algn="ctr"/>
+            <a:endParaRPr kumimoji="1" lang="ja-JP" altLang="en-US" dirty="0" err="1"/>
+          </a:p>
+        </p:txBody>
+      </p:sp>
     </p:spTree>
     <p:extLst>
       <p:ext uri="{BB962C8B-B14F-4D97-AF65-F5344CB8AC3E}">
@@ -4356,6 +4377,26 @@
 </file>
 
 <file path=customXml/item1.xml><?xml version="1.0" encoding="utf-8"?>
+<?mso-contentType ?>
+<FormTemplates xmlns="http://schemas.microsoft.com/sharepoint/v3/contenttype/forms">
+  <Display>DocumentLibraryForm</Display>
+  <Edit>DocumentLibraryForm</Edit>
+  <New>DocumentLibraryForm</New>
+</FormTemplates>
+</file>
+
+<file path=customXml/item2.xml><?xml version="1.0" encoding="utf-8"?>
+<p:properties xmlns:p="http://schemas.microsoft.com/office/2006/metadata/properties" xmlns:xsi="http://www.w3.org/2001/XMLSchema-instance" xmlns:pc="http://schemas.microsoft.com/office/infopath/2007/PartnerControls">
+  <documentManagement>
+    <lcf76f155ced4ddcb4097134ff3c332f xmlns="5858525f-8556-4a49-8c5b-46c9ac02e9a8">
+      <Terms xmlns="http://schemas.microsoft.com/office/infopath/2007/PartnerControls"/>
+    </lcf76f155ced4ddcb4097134ff3c332f>
+    <TaxCatchAll xmlns="c15da466-223d-4a9a-9a5d-eb2bee72a60a" xsi:nil="true"/>
+  </documentManagement>
+</p:properties>
+</file>
+
+<file path=customXml/item3.xml><?xml version="1.0" encoding="utf-8"?>
 <ct:contentTypeSchema xmlns:ct="http://schemas.microsoft.com/office/2006/metadata/contentType" xmlns:ma="http://schemas.microsoft.com/office/2006/metadata/properties/metaAttributes" ct:_="" ma:_="" ma:contentTypeName="Document" ma:contentTypeID="0x0101002892946DCD6EF84A8AD3B83D0B57F8EB" ma:contentTypeVersion="17" ma:contentTypeDescription="Create a new document." ma:contentTypeScope="" ma:versionID="b42be05bc74378c37795d3f925fb4a01">
   <xsd:schema xmlns:xsd="http://www.w3.org/2001/XMLSchema" xmlns:xs="http://www.w3.org/2001/XMLSchema" xmlns:p="http://schemas.microsoft.com/office/2006/metadata/properties" xmlns:ns2="5858525f-8556-4a49-8c5b-46c9ac02e9a8" xmlns:ns3="c15da466-223d-4a9a-9a5d-eb2bee72a60a" targetNamespace="http://schemas.microsoft.com/office/2006/metadata/properties" ma:root="true" ma:fieldsID="6370dd56b8fb32e5b01a7594ec1f1abe" ns2:_="" ns3:_="">
     <xsd:import namespace="5858525f-8556-4a49-8c5b-46c9ac02e9a8"/>
@@ -4604,41 +4645,10 @@
 </ct:contentTypeSchema>
 </file>
 
-<file path=customXml/item2.xml><?xml version="1.0" encoding="utf-8"?>
-<p:properties xmlns:p="http://schemas.microsoft.com/office/2006/metadata/properties" xmlns:xsi="http://www.w3.org/2001/XMLSchema-instance" xmlns:pc="http://schemas.microsoft.com/office/infopath/2007/PartnerControls">
-  <documentManagement>
-    <lcf76f155ced4ddcb4097134ff3c332f xmlns="5858525f-8556-4a49-8c5b-46c9ac02e9a8">
-      <Terms xmlns="http://schemas.microsoft.com/office/infopath/2007/PartnerControls"/>
-    </lcf76f155ced4ddcb4097134ff3c332f>
-    <TaxCatchAll xmlns="c15da466-223d-4a9a-9a5d-eb2bee72a60a" xsi:nil="true"/>
-  </documentManagement>
-</p:properties>
-</file>
-
-<file path=customXml/item3.xml><?xml version="1.0" encoding="utf-8"?>
-<?mso-contentType ?>
-<FormTemplates xmlns="http://schemas.microsoft.com/sharepoint/v3/contenttype/forms">
-  <Display>DocumentLibraryForm</Display>
-  <Edit>DocumentLibraryForm</Edit>
-  <New>DocumentLibraryForm</New>
-</FormTemplates>
-</file>
-
 <file path=customXml/itemProps1.xml><?xml version="1.0" encoding="utf-8"?>
-<ds:datastoreItem xmlns:ds="http://schemas.openxmlformats.org/officeDocument/2006/customXml" ds:itemID="{379A09CB-99D1-4CE1-93AE-964D83FB2A11}">
+<ds:datastoreItem xmlns:ds="http://schemas.openxmlformats.org/officeDocument/2006/customXml" ds:itemID="{3D7F2428-6C02-4D32-B14D-EBC3389A58AD}">
   <ds:schemaRefs>
-    <ds:schemaRef ds:uri="5858525f-8556-4a49-8c5b-46c9ac02e9a8"/>
-    <ds:schemaRef ds:uri="c15da466-223d-4a9a-9a5d-eb2bee72a60a"/>
-    <ds:schemaRef ds:uri="http://purl.org/dc/elements/1.1/"/>
-    <ds:schemaRef ds:uri="http://purl.org/dc/terms/"/>
-    <ds:schemaRef ds:uri="http://schemas.microsoft.com/internal/obd"/>
-    <ds:schemaRef ds:uri="http://schemas.microsoft.com/office/2006/documentManagement/types"/>
-    <ds:schemaRef ds:uri="http://schemas.microsoft.com/office/2006/metadata/contentType"/>
-    <ds:schemaRef ds:uri="http://schemas.microsoft.com/office/2006/metadata/properties"/>
-    <ds:schemaRef ds:uri="http://schemas.microsoft.com/office/2006/metadata/properties/metaAttributes"/>
-    <ds:schemaRef ds:uri="http://schemas.microsoft.com/office/infopath/2007/PartnerControls"/>
-    <ds:schemaRef ds:uri="http://schemas.openxmlformats.org/package/2006/metadata/core-properties"/>
-    <ds:schemaRef ds:uri="http://www.w3.org/2001/XMLSchema"/>
+    <ds:schemaRef ds:uri="http://schemas.microsoft.com/sharepoint/v3/contenttype/forms"/>
   </ds:schemaRefs>
 </ds:datastoreItem>
 </file>
@@ -4661,9 +4671,20 @@
 </file>
 
 <file path=customXml/itemProps3.xml><?xml version="1.0" encoding="utf-8"?>
-<ds:datastoreItem xmlns:ds="http://schemas.openxmlformats.org/officeDocument/2006/customXml" ds:itemID="{3D7F2428-6C02-4D32-B14D-EBC3389A58AD}">
+<ds:datastoreItem xmlns:ds="http://schemas.openxmlformats.org/officeDocument/2006/customXml" ds:itemID="{379A09CB-99D1-4CE1-93AE-964D83FB2A11}">
   <ds:schemaRefs>
-    <ds:schemaRef ds:uri="http://schemas.microsoft.com/sharepoint/v3/contenttype/forms"/>
+    <ds:schemaRef ds:uri="5858525f-8556-4a49-8c5b-46c9ac02e9a8"/>
+    <ds:schemaRef ds:uri="c15da466-223d-4a9a-9a5d-eb2bee72a60a"/>
+    <ds:schemaRef ds:uri="http://purl.org/dc/elements/1.1/"/>
+    <ds:schemaRef ds:uri="http://purl.org/dc/terms/"/>
+    <ds:schemaRef ds:uri="http://schemas.microsoft.com/internal/obd"/>
+    <ds:schemaRef ds:uri="http://schemas.microsoft.com/office/2006/documentManagement/types"/>
+    <ds:schemaRef ds:uri="http://schemas.microsoft.com/office/2006/metadata/contentType"/>
+    <ds:schemaRef ds:uri="http://schemas.microsoft.com/office/2006/metadata/properties"/>
+    <ds:schemaRef ds:uri="http://schemas.microsoft.com/office/2006/metadata/properties/metaAttributes"/>
+    <ds:schemaRef ds:uri="http://schemas.microsoft.com/office/infopath/2007/PartnerControls"/>
+    <ds:schemaRef ds:uri="http://schemas.openxmlformats.org/package/2006/metadata/core-properties"/>
+    <ds:schemaRef ds:uri="http://www.w3.org/2001/XMLSchema"/>
   </ds:schemaRefs>
 </ds:datastoreItem>
 </file>
--- a/image/image.pptx
+++ b/image/image.pptx
@@ -238,7 +238,7 @@
           <a:p>
             <a:fld id="{B4264C6C-A75F-4F4B-983B-561CAC384A89}" type="datetimeFigureOut">
               <a:rPr lang="en-US" smtClean="0"/>
-              <a:t>11/12/25</a:t>
+              <a:t>11/13/25</a:t>
             </a:fld>
             <a:endParaRPr lang="en-US"/>
           </a:p>
@@ -431,7 +431,7 @@
           <a:p>
             <a:fld id="{4ECC8E03-5825-4C42-8DC2-B65F04B88FE7}" type="datetimeFigureOut">
               <a:rPr lang="en-US" smtClean="0"/>
-              <a:t>11/12/25</a:t>
+              <a:t>11/13/25</a:t>
             </a:fld>
             <a:endParaRPr lang="en-US"/>
           </a:p>
@@ -3467,37 +3467,227 @@
       </p:cxnSp>
       <p:sp>
         <p:nvSpPr>
-          <p:cNvPr id="8" name="テキスト ボックス 7">
+          <p:cNvPr id="10" name="TextBox 21">
             <a:extLst>
               <a:ext uri="{FF2B5EF4-FFF2-40B4-BE49-F238E27FC236}">
-                <a16:creationId xmlns:a16="http://schemas.microsoft.com/office/drawing/2014/main" id="{000BBDB6-557A-E67A-CFAF-0C656DF357D5}"/>
+                <a16:creationId xmlns:a16="http://schemas.microsoft.com/office/drawing/2014/main" id="{EB29CED0-644D-ECAB-939A-97F5C02531F1}"/>
               </a:ext>
             </a:extLst>
           </p:cNvPr>
-          <p:cNvSpPr txBox="1"/>
+          <p:cNvSpPr txBox="1">
+            <a:spLocks noChangeArrowheads="1"/>
+          </p:cNvSpPr>
           <p:nvPr/>
         </p:nvSpPr>
-        <p:spPr>
+        <p:spPr bwMode="auto">
           <a:xfrm>
-            <a:off x="13728325" y="1210962"/>
-            <a:ext cx="65" cy="369332"/>
+            <a:off x="8170399" y="3469663"/>
+            <a:ext cx="1081872" cy="261610"/>
           </a:xfrm>
           <a:prstGeom prst="rect">
             <a:avLst/>
           </a:prstGeom>
           <a:noFill/>
+          <a:ln>
+            <a:noFill/>
+          </a:ln>
+          <a:extLst>
+            <a:ext uri="{909E8E84-426E-40DD-AFC4-6F175D3DCCD1}">
+              <a14:hiddenFill xmlns:a14="http://schemas.microsoft.com/office/drawing/2010/main">
+                <a:solidFill>
+                  <a:srgbClr val="FFFFFF"/>
+                </a:solidFill>
+              </a14:hiddenFill>
+            </a:ext>
+            <a:ext uri="{91240B29-F687-4F45-9708-019B960494DF}">
+              <a14:hiddenLine xmlns:a14="http://schemas.microsoft.com/office/drawing/2010/main" w="9525">
+                <a:solidFill>
+                  <a:srgbClr val="000000"/>
+                </a:solidFill>
+                <a:miter lim="800000"/>
+                <a:headEnd/>
+                <a:tailEnd/>
+              </a14:hiddenLine>
+            </a:ext>
+          </a:extLst>
         </p:spPr>
         <p:txBody>
-          <a:bodyPr wrap="none" lIns="0" rIns="0" rtlCol="0">
+          <a:bodyPr wrap="square">
             <a:spAutoFit/>
           </a:bodyPr>
-          <a:lstStyle/>
+          <a:lstStyle>
+            <a:lvl1pPr>
+              <a:defRPr>
+                <a:solidFill>
+                  <a:schemeClr val="tx1"/>
+                </a:solidFill>
+                <a:latin typeface="Calibri" panose="020F0502020204030204" pitchFamily="34" charset="0"/>
+              </a:defRPr>
+            </a:lvl1pPr>
+            <a:lvl2pPr marL="742950" indent="-285750">
+              <a:defRPr>
+                <a:solidFill>
+                  <a:schemeClr val="tx1"/>
+                </a:solidFill>
+                <a:latin typeface="Calibri" panose="020F0502020204030204" pitchFamily="34" charset="0"/>
+              </a:defRPr>
+            </a:lvl2pPr>
+            <a:lvl3pPr marL="1143000" indent="-228600">
+              <a:defRPr>
+                <a:solidFill>
+                  <a:schemeClr val="tx1"/>
+                </a:solidFill>
+                <a:latin typeface="Calibri" panose="020F0502020204030204" pitchFamily="34" charset="0"/>
+              </a:defRPr>
+            </a:lvl3pPr>
+            <a:lvl4pPr marL="1600200" indent="-228600">
+              <a:defRPr>
+                <a:solidFill>
+                  <a:schemeClr val="tx1"/>
+                </a:solidFill>
+                <a:latin typeface="Calibri" panose="020F0502020204030204" pitchFamily="34" charset="0"/>
+              </a:defRPr>
+            </a:lvl4pPr>
+            <a:lvl5pPr marL="2057400" indent="-228600">
+              <a:defRPr>
+                <a:solidFill>
+                  <a:schemeClr val="tx1"/>
+                </a:solidFill>
+                <a:latin typeface="Calibri" panose="020F0502020204030204" pitchFamily="34" charset="0"/>
+              </a:defRPr>
+            </a:lvl5pPr>
+            <a:lvl6pPr marL="2514600" indent="-228600" eaLnBrk="0" fontAlgn="base" hangingPunct="0">
+              <a:spcBef>
+                <a:spcPct val="0"/>
+              </a:spcBef>
+              <a:spcAft>
+                <a:spcPct val="0"/>
+              </a:spcAft>
+              <a:defRPr>
+                <a:solidFill>
+                  <a:schemeClr val="tx1"/>
+                </a:solidFill>
+                <a:latin typeface="Calibri" panose="020F0502020204030204" pitchFamily="34" charset="0"/>
+              </a:defRPr>
+            </a:lvl6pPr>
+            <a:lvl7pPr marL="2971800" indent="-228600" eaLnBrk="0" fontAlgn="base" hangingPunct="0">
+              <a:spcBef>
+                <a:spcPct val="0"/>
+              </a:spcBef>
+              <a:spcAft>
+                <a:spcPct val="0"/>
+              </a:spcAft>
+              <a:defRPr>
+                <a:solidFill>
+                  <a:schemeClr val="tx1"/>
+                </a:solidFill>
+                <a:latin typeface="Calibri" panose="020F0502020204030204" pitchFamily="34" charset="0"/>
+              </a:defRPr>
+            </a:lvl7pPr>
+            <a:lvl8pPr marL="3429000" indent="-228600" eaLnBrk="0" fontAlgn="base" hangingPunct="0">
+              <a:spcBef>
+                <a:spcPct val="0"/>
+              </a:spcBef>
+              <a:spcAft>
+                <a:spcPct val="0"/>
+              </a:spcAft>
+              <a:defRPr>
+                <a:solidFill>
+                  <a:schemeClr val="tx1"/>
+                </a:solidFill>
+                <a:latin typeface="Calibri" panose="020F0502020204030204" pitchFamily="34" charset="0"/>
+              </a:defRPr>
+            </a:lvl8pPr>
+            <a:lvl9pPr marL="3886200" indent="-228600" eaLnBrk="0" fontAlgn="base" hangingPunct="0">
+              <a:spcBef>
+                <a:spcPct val="0"/>
+              </a:spcBef>
+              <a:spcAft>
+                <a:spcPct val="0"/>
+              </a:spcAft>
+              <a:defRPr>
+                <a:solidFill>
+                  <a:schemeClr val="tx1"/>
+                </a:solidFill>
+                <a:latin typeface="Calibri" panose="020F0502020204030204" pitchFamily="34" charset="0"/>
+              </a:defRPr>
+            </a:lvl9pPr>
+          </a:lstStyle>
           <a:p>
-            <a:pPr algn="ctr"/>
-            <a:endParaRPr kumimoji="1" lang="ja-JP" altLang="en-US" dirty="0" err="1"/>
+            <a:pPr algn="ctr" eaLnBrk="1" hangingPunct="1">
+              <a:spcBef>
+                <a:spcPts val="600"/>
+              </a:spcBef>
+            </a:pPr>
+            <a:r>
+              <a:rPr lang="en-US" altLang="en-US" sz="1050" dirty="0">
+                <a:latin typeface="Meiryo" panose="020B0604030504040204" pitchFamily="34" charset="-128"/>
+                <a:ea typeface="Meiryo" panose="020B0604030504040204" pitchFamily="34" charset="-128"/>
+                <a:cs typeface="Arial" panose="020B0604020202020204" pitchFamily="34" charset="0"/>
+              </a:rPr>
+              <a:t>DMS SC</a:t>
+            </a:r>
           </a:p>
         </p:txBody>
       </p:sp>
+      <p:pic>
+        <p:nvPicPr>
+          <p:cNvPr id="11" name="Graphic 18" descr="AWS Database Migration Service (AWS DMS) service icon.">
+            <a:extLst>
+              <a:ext uri="{FF2B5EF4-FFF2-40B4-BE49-F238E27FC236}">
+                <a16:creationId xmlns:a16="http://schemas.microsoft.com/office/drawing/2014/main" id="{69A71E23-4421-B1C7-A239-E56A87F5D53B}"/>
+              </a:ext>
+            </a:extLst>
+          </p:cNvPr>
+          <p:cNvPicPr>
+            <a:picLocks noChangeAspect="1" noChangeArrowheads="1"/>
+          </p:cNvPicPr>
+          <p:nvPr/>
+        </p:nvPicPr>
+        <p:blipFill>
+          <a:blip r:embed="rId21">
+            <a:extLst>
+              <a:ext uri="{96DAC541-7B7A-43D3-8B79-37D633B846F1}">
+                <asvg:svgBlip xmlns:asvg="http://schemas.microsoft.com/office/drawing/2016/SVG/main" r:embed="rId22"/>
+              </a:ext>
+            </a:extLst>
+          </a:blip>
+          <a:srcRect/>
+          <a:stretch/>
+        </p:blipFill>
+        <p:spPr bwMode="auto">
+          <a:xfrm>
+            <a:off x="8483039" y="2991670"/>
+            <a:ext cx="458713" cy="458713"/>
+          </a:xfrm>
+          <a:prstGeom prst="rect">
+            <a:avLst/>
+          </a:prstGeom>
+          <a:noFill/>
+          <a:ln>
+            <a:noFill/>
+          </a:ln>
+          <a:extLst>
+            <a:ext uri="{909E8E84-426E-40DD-AFC4-6F175D3DCCD1}">
+              <a14:hiddenFill xmlns:a14="http://schemas.microsoft.com/office/drawing/2010/main">
+                <a:solidFill>
+                  <a:srgbClr val="FFFFFF"/>
+                </a:solidFill>
+              </a14:hiddenFill>
+            </a:ext>
+            <a:ext uri="{91240B29-F687-4F45-9708-019B960494DF}">
+              <a14:hiddenLine xmlns:a14="http://schemas.microsoft.com/office/drawing/2010/main" w="9525">
+                <a:solidFill>
+                  <a:srgbClr val="000000"/>
+                </a:solidFill>
+                <a:miter lim="800000"/>
+                <a:headEnd/>
+                <a:tailEnd/>
+              </a14:hiddenLine>
+            </a:ext>
+          </a:extLst>
+        </p:spPr>
+      </p:pic>
     </p:spTree>
     <p:extLst>
       <p:ext uri="{BB962C8B-B14F-4D97-AF65-F5344CB8AC3E}">
@@ -4377,26 +4567,6 @@
 </file>
 
 <file path=customXml/item1.xml><?xml version="1.0" encoding="utf-8"?>
-<?mso-contentType ?>
-<FormTemplates xmlns="http://schemas.microsoft.com/sharepoint/v3/contenttype/forms">
-  <Display>DocumentLibraryForm</Display>
-  <Edit>DocumentLibraryForm</Edit>
-  <New>DocumentLibraryForm</New>
-</FormTemplates>
-</file>
-
-<file path=customXml/item2.xml><?xml version="1.0" encoding="utf-8"?>
-<p:properties xmlns:p="http://schemas.microsoft.com/office/2006/metadata/properties" xmlns:xsi="http://www.w3.org/2001/XMLSchema-instance" xmlns:pc="http://schemas.microsoft.com/office/infopath/2007/PartnerControls">
-  <documentManagement>
-    <lcf76f155ced4ddcb4097134ff3c332f xmlns="5858525f-8556-4a49-8c5b-46c9ac02e9a8">
-      <Terms xmlns="http://schemas.microsoft.com/office/infopath/2007/PartnerControls"/>
-    </lcf76f155ced4ddcb4097134ff3c332f>
-    <TaxCatchAll xmlns="c15da466-223d-4a9a-9a5d-eb2bee72a60a" xsi:nil="true"/>
-  </documentManagement>
-</p:properties>
-</file>
-
-<file path=customXml/item3.xml><?xml version="1.0" encoding="utf-8"?>
 <ct:contentTypeSchema xmlns:ct="http://schemas.microsoft.com/office/2006/metadata/contentType" xmlns:ma="http://schemas.microsoft.com/office/2006/metadata/properties/metaAttributes" ct:_="" ma:_="" ma:contentTypeName="Document" ma:contentTypeID="0x0101002892946DCD6EF84A8AD3B83D0B57F8EB" ma:contentTypeVersion="17" ma:contentTypeDescription="Create a new document." ma:contentTypeScope="" ma:versionID="b42be05bc74378c37795d3f925fb4a01">
   <xsd:schema xmlns:xsd="http://www.w3.org/2001/XMLSchema" xmlns:xs="http://www.w3.org/2001/XMLSchema" xmlns:p="http://schemas.microsoft.com/office/2006/metadata/properties" xmlns:ns2="5858525f-8556-4a49-8c5b-46c9ac02e9a8" xmlns:ns3="c15da466-223d-4a9a-9a5d-eb2bee72a60a" targetNamespace="http://schemas.microsoft.com/office/2006/metadata/properties" ma:root="true" ma:fieldsID="6370dd56b8fb32e5b01a7594ec1f1abe" ns2:_="" ns3:_="">
     <xsd:import namespace="5858525f-8556-4a49-8c5b-46c9ac02e9a8"/>
@@ -4645,10 +4815,41 @@
 </ct:contentTypeSchema>
 </file>
 
+<file path=customXml/item2.xml><?xml version="1.0" encoding="utf-8"?>
+<p:properties xmlns:p="http://schemas.microsoft.com/office/2006/metadata/properties" xmlns:xsi="http://www.w3.org/2001/XMLSchema-instance" xmlns:pc="http://schemas.microsoft.com/office/infopath/2007/PartnerControls">
+  <documentManagement>
+    <lcf76f155ced4ddcb4097134ff3c332f xmlns="5858525f-8556-4a49-8c5b-46c9ac02e9a8">
+      <Terms xmlns="http://schemas.microsoft.com/office/infopath/2007/PartnerControls"/>
+    </lcf76f155ced4ddcb4097134ff3c332f>
+    <TaxCatchAll xmlns="c15da466-223d-4a9a-9a5d-eb2bee72a60a" xsi:nil="true"/>
+  </documentManagement>
+</p:properties>
+</file>
+
+<file path=customXml/item3.xml><?xml version="1.0" encoding="utf-8"?>
+<?mso-contentType ?>
+<FormTemplates xmlns="http://schemas.microsoft.com/sharepoint/v3/contenttype/forms">
+  <Display>DocumentLibraryForm</Display>
+  <Edit>DocumentLibraryForm</Edit>
+  <New>DocumentLibraryForm</New>
+</FormTemplates>
+</file>
+
 <file path=customXml/itemProps1.xml><?xml version="1.0" encoding="utf-8"?>
-<ds:datastoreItem xmlns:ds="http://schemas.openxmlformats.org/officeDocument/2006/customXml" ds:itemID="{3D7F2428-6C02-4D32-B14D-EBC3389A58AD}">
+<ds:datastoreItem xmlns:ds="http://schemas.openxmlformats.org/officeDocument/2006/customXml" ds:itemID="{379A09CB-99D1-4CE1-93AE-964D83FB2A11}">
   <ds:schemaRefs>
-    <ds:schemaRef ds:uri="http://schemas.microsoft.com/sharepoint/v3/contenttype/forms"/>
+    <ds:schemaRef ds:uri="5858525f-8556-4a49-8c5b-46c9ac02e9a8"/>
+    <ds:schemaRef ds:uri="c15da466-223d-4a9a-9a5d-eb2bee72a60a"/>
+    <ds:schemaRef ds:uri="http://purl.org/dc/elements/1.1/"/>
+    <ds:schemaRef ds:uri="http://purl.org/dc/terms/"/>
+    <ds:schemaRef ds:uri="http://schemas.microsoft.com/internal/obd"/>
+    <ds:schemaRef ds:uri="http://schemas.microsoft.com/office/2006/documentManagement/types"/>
+    <ds:schemaRef ds:uri="http://schemas.microsoft.com/office/2006/metadata/contentType"/>
+    <ds:schemaRef ds:uri="http://schemas.microsoft.com/office/2006/metadata/properties"/>
+    <ds:schemaRef ds:uri="http://schemas.microsoft.com/office/2006/metadata/properties/metaAttributes"/>
+    <ds:schemaRef ds:uri="http://schemas.microsoft.com/office/infopath/2007/PartnerControls"/>
+    <ds:schemaRef ds:uri="http://schemas.openxmlformats.org/package/2006/metadata/core-properties"/>
+    <ds:schemaRef ds:uri="http://www.w3.org/2001/XMLSchema"/>
   </ds:schemaRefs>
 </ds:datastoreItem>
 </file>
@@ -4671,20 +4872,9 @@
 </file>
 
 <file path=customXml/itemProps3.xml><?xml version="1.0" encoding="utf-8"?>
-<ds:datastoreItem xmlns:ds="http://schemas.openxmlformats.org/officeDocument/2006/customXml" ds:itemID="{379A09CB-99D1-4CE1-93AE-964D83FB2A11}">
+<ds:datastoreItem xmlns:ds="http://schemas.openxmlformats.org/officeDocument/2006/customXml" ds:itemID="{3D7F2428-6C02-4D32-B14D-EBC3389A58AD}">
   <ds:schemaRefs>
-    <ds:schemaRef ds:uri="5858525f-8556-4a49-8c5b-46c9ac02e9a8"/>
-    <ds:schemaRef ds:uri="c15da466-223d-4a9a-9a5d-eb2bee72a60a"/>
-    <ds:schemaRef ds:uri="http://purl.org/dc/elements/1.1/"/>
-    <ds:schemaRef ds:uri="http://purl.org/dc/terms/"/>
-    <ds:schemaRef ds:uri="http://schemas.microsoft.com/internal/obd"/>
-    <ds:schemaRef ds:uri="http://schemas.microsoft.com/office/2006/documentManagement/types"/>
-    <ds:schemaRef ds:uri="http://schemas.microsoft.com/office/2006/metadata/contentType"/>
-    <ds:schemaRef ds:uri="http://schemas.microsoft.com/office/2006/metadata/properties"/>
-    <ds:schemaRef ds:uri="http://schemas.microsoft.com/office/2006/metadata/properties/metaAttributes"/>
-    <ds:schemaRef ds:uri="http://schemas.microsoft.com/office/infopath/2007/PartnerControls"/>
-    <ds:schemaRef ds:uri="http://schemas.openxmlformats.org/package/2006/metadata/core-properties"/>
-    <ds:schemaRef ds:uri="http://www.w3.org/2001/XMLSchema"/>
+    <ds:schemaRef ds:uri="http://schemas.microsoft.com/sharepoint/v3/contenttype/forms"/>
   </ds:schemaRefs>
 </ds:datastoreItem>
 </file>